--- a/outputs/wk4/KR/deck_wk4_KR_131290.pptx
+++ b/outputs/wk4/KR/deck_wk4_KR_131290.pptx
@@ -5840,7 +5840,7 @@
                 </a:solidFill>
                 <a:latin typeface="맑은 고딕"/>
               </a:rPr>
-              <a:t>• 실제 18.69% vs 예측 -5~10% → 예측 범위 이탈</a:t>
+              <a:t>• 실제 18.69% vs 예측 -5~10% → 크게 성공 (상단 10% 대비 +8.7%p)</a:t>
             </a:r>
           </a:p>
           <a:p>
